--- a/Poster/2023.05.03_Poster_Landscape.pptx
+++ b/Poster/2023.05.03_Poster_Landscape.pptx
@@ -12771,6 +12771,84 @@
           <a:p>
             <a:pPr algn="ctr"/>
             <a:endParaRPr lang="de-DE" sz="8201"/>
+          </a:p>
+        </p:txBody>
+      </p:sp>
+      <p:sp>
+        <p:nvSpPr>
+          <p:cNvPr id="2" name="Rectangular Callout 1">
+            <a:extLst>
+              <a:ext uri="{FF2B5EF4-FFF2-40B4-BE49-F238E27FC236}">
+                <a16:creationId xmlns:a16="http://schemas.microsoft.com/office/drawing/2014/main" id="{87F02006-D8C9-6B13-826E-68628A263545}"/>
+              </a:ext>
+            </a:extLst>
+          </p:cNvPr>
+          <p:cNvSpPr/>
+          <p:nvPr/>
+        </p:nvSpPr>
+        <p:spPr>
+          <a:xfrm>
+            <a:off x="12973246" y="1166744"/>
+            <a:ext cx="10618284" cy="4608512"/>
+          </a:xfrm>
+          <a:prstGeom prst="wedgeRectCallout">
+            <a:avLst/>
+          </a:prstGeom>
+        </p:spPr>
+        <p:style>
+          <a:lnRef idx="2">
+            <a:schemeClr val="accent5">
+              <a:shade val="50000"/>
+            </a:schemeClr>
+          </a:lnRef>
+          <a:fillRef idx="1">
+            <a:schemeClr val="accent5"/>
+          </a:fillRef>
+          <a:effectRef idx="0">
+            <a:schemeClr val="accent5"/>
+          </a:effectRef>
+          <a:fontRef idx="minor">
+            <a:schemeClr val="lt1"/>
+          </a:fontRef>
+        </p:style>
+        <p:txBody>
+          <a:bodyPr rtlCol="0" anchor="ctr"/>
+          <a:lstStyle/>
+          <a:p>
+            <a:r>
+              <a:rPr lang="en-DE" sz="3600" dirty="0"/>
+              <a:t>Information (please delete):</a:t>
+            </a:r>
+          </a:p>
+          <a:p>
+            <a:pPr marL="685800" indent="-685800">
+              <a:buFont typeface="Arial" panose="020B0604020202020204" pitchFamily="34" charset="0"/>
+              <a:buChar char="•"/>
+            </a:pPr>
+            <a:r>
+              <a:rPr lang="en-DE" sz="3600" dirty="0"/>
+              <a:t>Use Arial, Helvetica, Helvetica Neue or TUM Neue Helvetica</a:t>
+            </a:r>
+          </a:p>
+          <a:p>
+            <a:pPr marL="685800" indent="-685800">
+              <a:buFont typeface="Arial" panose="020B0604020202020204" pitchFamily="34" charset="0"/>
+              <a:buChar char="•"/>
+            </a:pPr>
+            <a:r>
+              <a:rPr lang="en-DE" sz="3600" dirty="0"/>
+              <a:t>You can reshape the boxes to fit to your poster content.</a:t>
+            </a:r>
+          </a:p>
+          <a:p>
+            <a:pPr marL="685800" indent="-685800">
+              <a:buFont typeface="Arial" panose="020B0604020202020204" pitchFamily="34" charset="0"/>
+              <a:buChar char="•"/>
+            </a:pPr>
+            <a:r>
+              <a:rPr lang="en-DE" sz="3600" dirty="0"/>
+              <a:t>You can remove the boxes or recolour them, preferably in pastel colours.</a:t>
+            </a:r>
           </a:p>
         </p:txBody>
       </p:sp>
